--- a/assets/Buyer Persona Example.pptx
+++ b/assets/Buyer Persona Example.pptx
@@ -203,7 +203,7 @@
           <a:p>
             <a:fld id="{EEB74647-ACBC-DC4B-B01C-EF0C3421483F}" type="datetimeFigureOut">
               <a:rPr lang="en-US" smtClean="0"/>
-              <a:t>10/1/24</a:t>
+              <a:t>8/1/26</a:t>
             </a:fld>
             <a:endParaRPr lang="en-US"/>
           </a:p>
@@ -4271,7 +4271,7 @@
         <p:fade/>
       </p:transition>
     </mc:Choice>
-    <mc:Fallback xmlns="" xmlns:mv="urn:schemas-microsoft-com:mac:vml" xmlns:c="http://schemas.openxmlformats.org/drawingml/2006/chart" xmlns:dgm="http://schemas.openxmlformats.org/drawingml/2006/diagram" xmlns:o="urn:schemas-microsoft-com:office:office" xmlns:v="urn:schemas-microsoft-com:vml" xmlns:pvml="urn:schemas-microsoft-com:office:powerpoint" xmlns:com="http://schemas.openxmlformats.org/drawingml/2006/compatibility" xmlns:p15="http://schemas.microsoft.com/office/powerpoint/2012/main" xmlns:ahyp="http://schemas.microsoft.com/office/drawing/2018/hyperlinkcolor">
+    <mc:Fallback xmlns:ahyp="http://schemas.microsoft.com/office/drawing/2018/hyperlinkcolor" xmlns:p15="http://schemas.microsoft.com/office/powerpoint/2012/main" xmlns:com="http://schemas.openxmlformats.org/drawingml/2006/compatibility" xmlns:pvml="urn:schemas-microsoft-com:office:powerpoint" xmlns:v="urn:schemas-microsoft-com:vml" xmlns:o="urn:schemas-microsoft-com:office:office" xmlns:dgm="http://schemas.openxmlformats.org/drawingml/2006/diagram" xmlns:c="http://schemas.openxmlformats.org/drawingml/2006/chart" xmlns:mv="urn:schemas-microsoft-com:mac:vml" xmlns="">
       <p:transition spd="slow">
         <p:fade/>
       </p:transition>
@@ -8047,7 +8047,7 @@
         <p:fade/>
       </p:transition>
     </mc:Choice>
-    <mc:Fallback xmlns="" xmlns:mv="urn:schemas-microsoft-com:mac:vml" xmlns:c="http://schemas.openxmlformats.org/drawingml/2006/chart" xmlns:dgm="http://schemas.openxmlformats.org/drawingml/2006/diagram" xmlns:o="urn:schemas-microsoft-com:office:office" xmlns:v="urn:schemas-microsoft-com:vml" xmlns:pvml="urn:schemas-microsoft-com:office:powerpoint" xmlns:com="http://schemas.openxmlformats.org/drawingml/2006/compatibility" xmlns:p15="http://schemas.microsoft.com/office/powerpoint/2012/main" xmlns:ahyp="http://schemas.microsoft.com/office/drawing/2018/hyperlinkcolor">
+    <mc:Fallback xmlns:ahyp="http://schemas.microsoft.com/office/drawing/2018/hyperlinkcolor" xmlns:p15="http://schemas.microsoft.com/office/powerpoint/2012/main" xmlns:com="http://schemas.openxmlformats.org/drawingml/2006/compatibility" xmlns:pvml="urn:schemas-microsoft-com:office:powerpoint" xmlns:v="urn:schemas-microsoft-com:vml" xmlns:o="urn:schemas-microsoft-com:office:office" xmlns:dgm="http://schemas.openxmlformats.org/drawingml/2006/diagram" xmlns:c="http://schemas.openxmlformats.org/drawingml/2006/chart" xmlns:mv="urn:schemas-microsoft-com:mac:vml" xmlns="">
       <p:transition spd="slow">
         <p:fade/>
       </p:transition>
@@ -8333,10 +8333,10 @@
             <p:nvPr/>
           </p:nvPicPr>
           <p:blipFill>
-            <a:blip r:embed="rId4">
+            <a:blip>
               <a:extLst>
                 <a:ext uri="{96DAC541-7B7A-43D3-8B79-37D633B846F1}">
-                  <asvg:svgBlip xmlns:asvg="http://schemas.microsoft.com/office/drawing/2016/SVG/main" r:embed="rId5"/>
+                  <asvg:svgBlip xmlns:asvg="http://schemas.microsoft.com/office/drawing/2016/SVG/main" r:embed="rId4"/>
                 </a:ext>
               </a:extLst>
             </a:blip>
@@ -9935,10 +9935,10 @@
           <p:nvPr/>
         </p:nvPicPr>
         <p:blipFill>
-          <a:blip r:embed="rId6">
+          <a:blip>
             <a:extLst>
               <a:ext uri="{96DAC541-7B7A-43D3-8B79-37D633B846F1}">
-                <asvg:svgBlip xmlns:asvg="http://schemas.microsoft.com/office/drawing/2016/SVG/main" r:embed="rId7"/>
+                <asvg:svgBlip xmlns:asvg="http://schemas.microsoft.com/office/drawing/2016/SVG/main" r:embed="rId5"/>
               </a:ext>
             </a:extLst>
           </a:blip>
@@ -9980,10 +9980,10 @@
           <p:nvPr/>
         </p:nvPicPr>
         <p:blipFill>
-          <a:blip r:embed="rId8">
+          <a:blip>
             <a:extLst>
               <a:ext uri="{96DAC541-7B7A-43D3-8B79-37D633B846F1}">
-                <asvg:svgBlip xmlns:asvg="http://schemas.microsoft.com/office/drawing/2016/SVG/main" r:embed="rId9"/>
+                <asvg:svgBlip xmlns:asvg="http://schemas.microsoft.com/office/drawing/2016/SVG/main" r:embed="rId6"/>
               </a:ext>
             </a:extLst>
           </a:blip>
@@ -10729,10 +10729,10 @@
           <p:nvPr/>
         </p:nvPicPr>
         <p:blipFill>
-          <a:blip r:embed="rId10">
+          <a:blip>
             <a:extLst>
               <a:ext uri="{96DAC541-7B7A-43D3-8B79-37D633B846F1}">
-                <asvg:svgBlip xmlns:asvg="http://schemas.microsoft.com/office/drawing/2016/SVG/main" r:embed="rId11"/>
+                <asvg:svgBlip xmlns:asvg="http://schemas.microsoft.com/office/drawing/2016/SVG/main" r:embed="rId7"/>
               </a:ext>
             </a:extLst>
           </a:blip>
@@ -10764,10 +10764,10 @@
           <p:nvPr/>
         </p:nvPicPr>
         <p:blipFill>
-          <a:blip r:embed="rId12">
+          <a:blip>
             <a:extLst>
               <a:ext uri="{96DAC541-7B7A-43D3-8B79-37D633B846F1}">
-                <asvg:svgBlip xmlns:asvg="http://schemas.microsoft.com/office/drawing/2016/SVG/main" r:embed="rId13"/>
+                <asvg:svgBlip xmlns:asvg="http://schemas.microsoft.com/office/drawing/2016/SVG/main" r:embed="rId8"/>
               </a:ext>
             </a:extLst>
           </a:blip>
@@ -10799,10 +10799,10 @@
           <p:nvPr/>
         </p:nvPicPr>
         <p:blipFill>
-          <a:blip r:embed="rId14">
+          <a:blip>
             <a:extLst>
               <a:ext uri="{96DAC541-7B7A-43D3-8B79-37D633B846F1}">
-                <asvg:svgBlip xmlns:asvg="http://schemas.microsoft.com/office/drawing/2016/SVG/main" r:embed="rId15"/>
+                <asvg:svgBlip xmlns:asvg="http://schemas.microsoft.com/office/drawing/2016/SVG/main" r:embed="rId9"/>
               </a:ext>
             </a:extLst>
           </a:blip>
@@ -10834,10 +10834,10 @@
           <p:nvPr/>
         </p:nvPicPr>
         <p:blipFill>
-          <a:blip r:embed="rId16">
+          <a:blip>
             <a:extLst>
               <a:ext uri="{96DAC541-7B7A-43D3-8B79-37D633B846F1}">
-                <asvg:svgBlip xmlns:asvg="http://schemas.microsoft.com/office/drawing/2016/SVG/main" r:embed="rId17"/>
+                <asvg:svgBlip xmlns:asvg="http://schemas.microsoft.com/office/drawing/2016/SVG/main" r:embed="rId10"/>
               </a:ext>
             </a:extLst>
           </a:blip>
@@ -10869,7 +10869,7 @@
           <p:nvPr/>
         </p:nvPicPr>
         <p:blipFill rotWithShape="1">
-          <a:blip r:embed="rId18" cstate="email">
+          <a:blip r:embed="rId11" cstate="email">
             <a:clrChange>
               <a:clrFrom>
                 <a:srgbClr val="F3F3F3"/>
@@ -10931,10 +10931,10 @@
           <p:nvPr/>
         </p:nvPicPr>
         <p:blipFill>
-          <a:blip r:embed="rId19">
+          <a:blip>
             <a:extLst>
               <a:ext uri="{96DAC541-7B7A-43D3-8B79-37D633B846F1}">
-                <asvg:svgBlip xmlns:asvg="http://schemas.microsoft.com/office/drawing/2016/SVG/main" r:embed="rId20"/>
+                <asvg:svgBlip xmlns:asvg="http://schemas.microsoft.com/office/drawing/2016/SVG/main" r:embed="rId12"/>
               </a:ext>
             </a:extLst>
           </a:blip>
@@ -11072,7 +11072,7 @@
               <a:rPr lang="en-US" sz="2800" b="1" dirty="0">
                 <a:latin typeface="IBM Plex Sans SmBld" panose="020B0503050203000203" pitchFamily="34" charset="0"/>
               </a:rPr>
-              <a:t>Customer Journey</a:t>
+              <a:t>Marketing Journey</a:t>
             </a:r>
           </a:p>
         </p:txBody>
@@ -14804,7 +14804,7 @@
                 </a:solidFill>
                 <a:latin typeface="+mj-lt"/>
               </a:rPr>
-              <a:t>IT Architect Buyer’s Journey Map</a:t>
+              <a:t>IT Architect Buyer’s Engagement Journey Map</a:t>
             </a:r>
           </a:p>
         </p:txBody>
